--- a/documents/최종발표자료_귀기울임.pptx
+++ b/documents/최종발표자료_귀기울임.pptx
@@ -4806,7 +4806,7 @@
                 <a:ea typeface="Noto Sans KR" pitchFamily="34" charset="-122"/>
                 <a:cs typeface="Noto Sans KR" pitchFamily="34" charset="-120"/>
               </a:rPr>
-              <a:t>308건</a:t>
+              <a:t>319건</a:t>
             </a:r>
             <a:endParaRPr lang="en-US" sz="2400" dirty="0"/>
           </a:p>
@@ -4868,7 +4868,7 @@
                 <a:ea typeface="Noto Sans KR DemiLight" pitchFamily="34" charset="-122"/>
                 <a:cs typeface="Noto Sans KR DemiLight" pitchFamily="34" charset="-120"/>
               </a:rPr>
-              <a:t>백엔드 109 · AI 22 · 앱 163 · 관리자 14</a:t>
+              <a:t>백엔드 118 · AI 22 · 앱 165 · 관리자 14</a:t>
             </a:r>
             <a:endParaRPr lang="en-US" sz="900" dirty="0"/>
           </a:p>

--- a/documents/최종발표자료_귀기울임.pptx
+++ b/documents/최종발표자료_귀기울임.pptx
@@ -10269,7 +10269,7 @@
                 <a:ea typeface="Noto Sans KR" pitchFamily="34" charset="-122"/>
                 <a:cs typeface="Noto Sans KR" pitchFamily="34" charset="-120"/>
               </a:rPr>
-              <a:t>그래서 «관찰 → 판단 → 먼저 다가감»으로 설계했습니다</a:t>
+              <a:t>그래서 «관찰 → 판단 → 선제 케어»로 설계했습니다</a:t>
             </a:r>
             <a:endParaRPr lang="en-US" sz="1500" dirty="0"/>
           </a:p>
@@ -11377,7 +11377,7 @@
                 <a:ea typeface="Noto Sans KR DemiLight" pitchFamily="34" charset="-122"/>
                 <a:cs typeface="Noto Sans KR DemiLight" pitchFamily="34" charset="-120"/>
               </a:rPr>
-              <a:t>연속 이탈 3일 → 조건 6개 검사 → 첫 발화 생성 → 세션 선생성 → FCM 푸시 · 홈 카드 · 배너로 도달</a:t>
+              <a:t>연속 이탈 3일 → 조건 6개 검사 → 첫 발화 생성 → 세션 선생성 → FCM 푸시 · 홈 카드 · 배너로 사용자에게 닿습니다</a:t>
             </a:r>
             <a:endParaRPr lang="en-US" sz="1150" dirty="0"/>
           </a:p>

--- a/documents/최종발표자료_귀기울임.pptx
+++ b/documents/최종발표자료_귀기울임.pptx
@@ -5532,7 +5532,7 @@
                 <a:ea typeface="Noto Sans KR DemiLight" pitchFamily="34" charset="-122"/>
                 <a:cs typeface="Noto Sans KR DemiLight" pitchFamily="34" charset="-120"/>
               </a:rPr>
-              <a:t>전체 사용자의 정상·주의·심각 비율을 한눈에</a:t>
+              <a:t>전체 사용자의 정상·주의·심각 비율을 한눈에 확인</a:t>
             </a:r>
             <a:endParaRPr lang="en-US" sz="1050" dirty="0"/>
           </a:p>
@@ -6385,7 +6385,7 @@
                 <a:ea typeface="Noto Sans KR DemiLight" pitchFamily="34" charset="-122"/>
                 <a:cs typeface="Noto Sans KR DemiLight" pitchFamily="34" charset="-120"/>
               </a:rPr>
-              <a:t>클라우드 배포 시</a:t>
+              <a:t>클라우드 배포 시에만</a:t>
             </a:r>
             <a:endParaRPr lang="en-US" sz="1050" dirty="0"/>
           </a:p>
@@ -6814,7 +6814,7 @@
                 <a:ea typeface="Noto Sans KR DemiLight" pitchFamily="34" charset="-122"/>
                 <a:cs typeface="Noto Sans KR DemiLight" pitchFamily="34" charset="-120"/>
               </a:rPr>
-              <a:t>전화·주민번호·이메일, 저장 전에 마스킹</a:t>
+              <a:t>전화·주민번호·이메일을 저장 전에 마스킹</a:t>
             </a:r>
             <a:endParaRPr lang="en-US" sz="1050" dirty="0"/>
           </a:p>
@@ -9216,7 +9216,7 @@
                 <a:ea typeface="Noto Sans KR" pitchFamily="34" charset="-122"/>
                 <a:cs typeface="Noto Sans KR" pitchFamily="34" charset="-120"/>
               </a:rPr>
-              <a:t>문제와 답</a:t>
+              <a:t>문제와 해결</a:t>
             </a:r>
             <a:endParaRPr lang="en-US" sz="2300" dirty="0"/>
           </a:p>
@@ -9898,7 +9898,7 @@
                 <a:ea typeface="Noto Sans KR Black" pitchFamily="34" charset="-122"/>
                 <a:cs typeface="Noto Sans KR Black" pitchFamily="34" charset="-120"/>
               </a:rPr>
-              <a:t>문제와 답</a:t>
+              <a:t>문제와 해결</a:t>
             </a:r>
             <a:endParaRPr lang="en-US" sz="3400" dirty="0"/>
           </a:p>
@@ -11416,7 +11416,7 @@
                 <a:ea typeface="Noto Sans KR" pitchFamily="34" charset="-122"/>
                 <a:cs typeface="Noto Sans KR" pitchFamily="34" charset="-120"/>
               </a:rPr>
-              <a:t>"감시 아닌가요?" — 장치를 넣었습니다</a:t>
+              <a:t>"감시 아닌가요?" — 장치를 마련했습니다</a:t>
             </a:r>
             <a:endParaRPr lang="en-US" sz="1400" dirty="0"/>
           </a:p>
@@ -13428,7 +13428,7 @@
                 <a:ea typeface="Noto Sans KR" pitchFamily="34" charset="-122"/>
                 <a:cs typeface="Noto Sans KR" pitchFamily="34" charset="-120"/>
               </a:rPr>
-              <a:t>앱이 "밀어 올리는" 구조 — 서버가 끌어오지 않습니다</a:t>
+              <a:t>앱이 "먼저 보내는" 구조 — 서버가 끌어오지 않습니다</a:t>
             </a:r>
             <a:endParaRPr lang="en-US" sz="1450" dirty="0"/>
           </a:p>

--- a/documents/최종발표자료_귀기울임.pptx
+++ b/documents/최종발표자료_귀기울임.pptx
@@ -3265,7 +3265,7 @@
                 <a:ea typeface="Noto Sans KR DemiLight" pitchFamily="34" charset="-122"/>
                 <a:cs typeface="Noto Sans KR DemiLight" pitchFamily="34" charset="-120"/>
               </a:rPr>
-              <a:t>문장의 맥락을 읽어 정밀하게 판정합니다</a:t>
+              <a:t>문장 맥락까지 읽어 더 정밀하게 판정합니다</a:t>
             </a:r>
             <a:endParaRPr lang="en-US" sz="1200" dirty="0"/>
           </a:p>
@@ -3463,7 +3463,7 @@
                 <a:ea typeface="Noto Sans KR DemiLight" pitchFamily="34" charset="-122"/>
                 <a:cs typeface="Noto Sans KR DemiLight" pitchFamily="34" charset="-120"/>
               </a:rPr>
-              <a:t>위기 판정과 응답 생성을 병렬로 돌리되, CRITICAL이면 생성된 응답을 폐기합니다. 그래서 스트리밍을 쓰지 않습니다 — 판정 전에 흘린 글자는 회수할 수 없습니다.</a:t>
+              <a:t>위기 판정과 응답 생성을 동시에 돌리지만, CRITICAL이면 만들어 둔 응답을 버립니다. 그래서 스트리밍을 쓰지 않습니다. 판정 전에 흘려보낸 글자는 되돌릴 수 없습니다.</a:t>
             </a:r>
             <a:endParaRPr lang="en-US" sz="1150" dirty="0"/>
           </a:p>
@@ -3505,7 +3505,7 @@
                 <a:ea typeface="Noto Sans KR DemiLight" pitchFamily="34" charset="-122"/>
                 <a:cs typeface="Noto Sans KR DemiLight" pitchFamily="34" charset="-120"/>
               </a:rPr>
-              <a:t>경고색을 쓰지 않습니다. </a:t>
+              <a:t>경고색은 쓰지 않습니다. </a:t>
             </a:r>
             <a:pPr indent="0" marL="0">
               <a:lnSpc>
@@ -3522,7 +3522,7 @@
                 <a:ea typeface="Noto Sans KR DemiLight" pitchFamily="34" charset="-122"/>
                 <a:cs typeface="Noto Sans KR DemiLight" pitchFamily="34" charset="-120"/>
               </a:rPr>
-              <a:t>빨강·주황은 불안을 키워 회피를 유발합니다.   </a:t>
+              <a:t>빨강·주황은 불안을 키워 회피를 부릅니다.   </a:t>
             </a:r>
             <a:pPr indent="0" marL="0">
               <a:lnSpc>
@@ -3539,7 +3539,7 @@
                 <a:ea typeface="Noto Sans KR DemiLight" pitchFamily="34" charset="-122"/>
                 <a:cs typeface="Noto Sans KR DemiLight" pitchFamily="34" charset="-120"/>
               </a:rPr>
-              <a:t>데이터가 없으면 "정상"이라 하지 않습니다. </a:t>
+              <a:t>데이터가 없다고 "정상"이라 하지도 않습니다. </a:t>
             </a:r>
             <a:pPr indent="0" marL="0">
               <a:lnSpc>
@@ -3556,7 +3556,7 @@
                 <a:ea typeface="Noto Sans KR DemiLight" pitchFamily="34" charset="-122"/>
                 <a:cs typeface="Noto Sans KR DemiLight" pitchFamily="34" charset="-120"/>
               </a:rPr>
-              <a:t>3일 미만이면 422로 끊습니다 — 편차 0을 정상으로 적재하면 위험을 놓칩니다.</a:t>
+              <a:t>3일 미만이면 422로 끊습니다. 편차 0을 정상으로 적재하면 위험을 놓칩니다.</a:t>
             </a:r>
             <a:endParaRPr lang="en-US" sz="1150" dirty="0"/>
           </a:p>
@@ -5349,7 +5349,7 @@
                 <a:ea typeface="Noto Sans KR" pitchFamily="34" charset="-122"/>
                 <a:cs typeface="Noto Sans KR" pitchFamily="34" charset="-120"/>
               </a:rPr>
-              <a:t>관리자 관제 웹 — 담당자의 눈으로 본 위험</a:t>
+              <a:t>관리자는 위험한 사람부터 봅니다</a:t>
             </a:r>
             <a:endParaRPr lang="en-US" sz="3000" dirty="0"/>
           </a:p>
@@ -5532,7 +5532,7 @@
                 <a:ea typeface="Noto Sans KR DemiLight" pitchFamily="34" charset="-122"/>
                 <a:cs typeface="Noto Sans KR DemiLight" pitchFamily="34" charset="-120"/>
               </a:rPr>
-              <a:t>전체 사용자의 정상·주의·심각 비율을 한눈에 확인</a:t>
+              <a:t>안정·주의·심각이 각각 몇 명인지 한눈에 봅니다</a:t>
             </a:r>
             <a:endParaRPr lang="en-US" sz="1050" dirty="0"/>
           </a:p>
@@ -5782,7 +5782,7 @@
                 <a:ea typeface="Noto Sans KR DemiLight" pitchFamily="34" charset="-122"/>
                 <a:cs typeface="Noto Sans KR DemiLight" pitchFamily="34" charset="-120"/>
               </a:rPr>
-              <a:t>개인별 라이프로그 추이와 대화 이력 확인</a:t>
+              <a:t>개인별 라이프로그 추이와 대화 이력을 확인합니다</a:t>
             </a:r>
             <a:endParaRPr lang="en-US" sz="1050" dirty="0"/>
           </a:p>
@@ -5907,7 +5907,7 @@
                 <a:ea typeface="Noto Sans KR DemiLight" pitchFamily="34" charset="-122"/>
                 <a:cs typeface="Noto Sans KR DemiLight" pitchFamily="34" charset="-120"/>
               </a:rPr>
-              <a:t>판정 시점과 대응 이력을 시계열로 추적</a:t>
+              <a:t>판정 시점과 대응 이력을 시간순으로 따라갑니다</a:t>
             </a:r>
             <a:endParaRPr lang="en-US" sz="1050" dirty="0"/>
           </a:p>
@@ -7018,7 +7018,7 @@
                 <a:ea typeface="Noto Sans KR" pitchFamily="34" charset="-122"/>
                 <a:cs typeface="Noto Sans KR" pitchFamily="34" charset="-120"/>
               </a:rPr>
-              <a:t>왜 전 컬럼 암호화를 안 했나</a:t>
+              <a:t>왜 전 컬럼 암호화를 하지 않았나</a:t>
             </a:r>
             <a:endParaRPr lang="en-US" sz="1300" dirty="0"/>
           </a:p>
@@ -7388,7 +7388,7 @@
                 <a:ea typeface="Noto Sans KR" pitchFamily="34" charset="-122"/>
                 <a:cs typeface="Noto Sans KR" pitchFamily="34" charset="-120"/>
               </a:rPr>
-              <a:t>못 한 것을 그대로 말씀드립니다</a:t>
+              <a:t>못 한 부분은 그대로 말씀드리겠습니다</a:t>
             </a:r>
             <a:endParaRPr lang="en-US" sz="3000" dirty="0"/>
           </a:p>
@@ -7557,7 +7557,7 @@
                 <a:ea typeface="Noto Sans KR DemiLight" pitchFamily="34" charset="-122"/>
                 <a:cs typeface="Noto Sans KR DemiLight" pitchFamily="34" charset="-120"/>
               </a:rPr>
-              <a:t>에뮬레이터에는 Health Connect 자체가 없어 워커 동작만 확인했습니다.</a:t>
+              <a:t>에뮬레이터에는 Health Connect가 없어 워커 동작만 확인했습니다.</a:t>
             </a:r>
             <a:endParaRPr lang="en-US" sz="1050" dirty="0"/>
           </a:p>
@@ -7726,7 +7726,7 @@
                 <a:ea typeface="Noto Sans KR DemiLight" pitchFamily="34" charset="-122"/>
                 <a:cs typeface="Noto Sans KR DemiLight" pitchFamily="34" charset="-120"/>
               </a:rPr>
-              <a:t>NFR-DV-002 의 3시간 미갱신 감지입니다. 주기 실행 주체를 아직 두지 않았습니다.</a:t>
+              <a:t>NFR-DV-002 의 3시간 미갱신 감지입니다. 이걸 주기적으로 돌려 줄 주체를 아직 두지 않았습니다.</a:t>
             </a:r>
             <a:endParaRPr lang="en-US" sz="1050" dirty="0"/>
           </a:p>
@@ -7895,7 +7895,7 @@
                 <a:ea typeface="Noto Sans KR DemiLight" pitchFamily="34" charset="-122"/>
                 <a:cs typeface="Noto Sans KR DemiLight" pitchFamily="34" charset="-120"/>
               </a:rPr>
-              <a:t>기술적으로 불가능한 게 아니라 macOS·Xcode·Apple 계정 등 장비·일정 문제입니다.</a:t>
+              <a:t>기술적으로 불가능한 것은 아닙니다. macOS·Xcode·Apple 계정 등 장비와 일정 문제입니다.</a:t>
             </a:r>
             <a:endParaRPr lang="en-US" sz="1050" dirty="0"/>
           </a:p>
@@ -8130,7 +8130,7 @@
                 <a:ea typeface="Noto Sans KR" pitchFamily="34" charset="-122"/>
                 <a:cs typeface="Noto Sans KR" pitchFamily="34" charset="-120"/>
               </a:rPr>
-              <a:t>평가 holdout</a:t>
+              <a:t>평가셋 holdout</a:t>
             </a:r>
             <a:endParaRPr lang="en-US" sz="1300" dirty="0"/>
           </a:p>
@@ -8233,7 +8233,7 @@
                 <a:ea typeface="Noto Sans KR DemiLight" pitchFamily="34" charset="-122"/>
                 <a:cs typeface="Noto Sans KR DemiLight" pitchFamily="34" charset="-120"/>
               </a:rPr>
-              <a:t>0.946은 이 평가셋 211건에 대한 값입니다. 새 문장으로 재검증하지 않았습니다.</a:t>
+              <a:t>0.946은 이 평가셋 211건에서 나온 값입니다. 새 문장으로는 다시 검증하지 않았습니다.</a:t>
             </a:r>
             <a:endParaRPr lang="en-US" sz="1050" dirty="0"/>
           </a:p>
@@ -8299,7 +8299,7 @@
                 <a:ea typeface="Noto Sans KR" pitchFamily="34" charset="-122"/>
                 <a:cs typeface="Noto Sans KR" pitchFamily="34" charset="-120"/>
               </a:rPr>
-              <a:t>남은 미탐 6건</a:t>
+              <a:t>놓친 6건</a:t>
             </a:r>
             <a:endParaRPr lang="en-US" sz="1300" dirty="0"/>
           </a:p>
@@ -8402,7 +8402,7 @@
                 <a:ea typeface="Noto Sans KR DemiLight" pitchFamily="34" charset="-122"/>
                 <a:cs typeface="Noto Sans KR DemiLight" pitchFamily="34" charset="-120"/>
               </a:rPr>
-              <a:t>완곡·작별·신변 정리 표현에 몰려 있고, 문장 하나로는 사람도 라벨이 갈립니다.</a:t>
+              <a:t>완곡·작별·신변 정리 표현에 몰려 있고, 문장 하나만으로는 사람도 라벨이 갈립니다.</a:t>
             </a:r>
             <a:endParaRPr lang="en-US" sz="1050" dirty="0"/>
           </a:p>
@@ -10086,7 +10086,7 @@
                 <a:ea typeface="Noto Sans KR" pitchFamily="34" charset="-122"/>
                 <a:cs typeface="Noto Sans KR" pitchFamily="34" charset="-120"/>
               </a:rPr>
-              <a:t>데이터는 쌓이는데, 앱은 열리지 않습니다</a:t>
+              <a:t>데이터는 쌓이는데, 사용자는 앱을 열지 않습니다</a:t>
             </a:r>
             <a:endParaRPr lang="en-US" sz="3000" dirty="0"/>
           </a:p>
@@ -10230,7 +10230,7 @@
                 <a:ea typeface="Noto Sans KR DemiLight" pitchFamily="34" charset="-122"/>
                 <a:cs typeface="Noto Sans KR DemiLight" pitchFamily="34" charset="-120"/>
               </a:rPr>
-              <a:t>그런데 정작 힘든 순간에는 앱을 열 힘조차 없습니다. 감지해 놓고 사용자를 기다리는 구조가 문제입니다.</a:t>
+              <a:t>그런데 정작 힘든 순간에는 사용자가 앱을 열 힘조차 없습니다. 감지해 놓고도 사용자를 기다리는 구조가 문제입니다.</a:t>
             </a:r>
             <a:endParaRPr lang="en-US" sz="1250" dirty="0"/>
           </a:p>
@@ -10269,7 +10269,7 @@
                 <a:ea typeface="Noto Sans KR" pitchFamily="34" charset="-122"/>
                 <a:cs typeface="Noto Sans KR" pitchFamily="34" charset="-120"/>
               </a:rPr>
-              <a:t>그래서 «관찰 → 판단 → 선제 케어»로 설계했습니다</a:t>
+              <a:t>그래서 «관찰 → 판단 → 선제 접촉»으로 설계했습니다</a:t>
             </a:r>
             <a:endParaRPr lang="en-US" sz="1500" dirty="0"/>
           </a:p>
@@ -10647,7 +10647,7 @@
                 <a:ea typeface="Noto Sans KR" pitchFamily="34" charset="-122"/>
                 <a:cs typeface="Noto Sans KR" pitchFamily="34" charset="-120"/>
               </a:rPr>
-              <a:t>개인 기준선 이탈 탐지</a:t>
+              <a:t>평소와 얼마나 다른가</a:t>
             </a:r>
             <a:endParaRPr lang="en-US" sz="1550" dirty="0"/>
           </a:p>
@@ -10869,7 +10869,7 @@
                 <a:ea typeface="Noto Sans KR" pitchFamily="34" charset="-122"/>
                 <a:cs typeface="Noto Sans KR" pitchFamily="34" charset="-120"/>
               </a:rPr>
-              <a:t>선제 케어</a:t>
+              <a:t>선제 접촉</a:t>
             </a:r>
             <a:endParaRPr lang="en-US" sz="1550" dirty="0"/>
           </a:p>
@@ -10911,7 +10911,7 @@
                 <a:ea typeface="Noto Sans KR DemiLight" pitchFamily="34" charset="-122"/>
                 <a:cs typeface="Noto Sans KR DemiLight" pitchFamily="34" charset="-120"/>
               </a:rPr>
-              <a:t>콘텐츠 추천부터, 필요하면 시스템이 먼저 말을 거는 대화까지 이어집니다.</a:t>
+              <a:t>콘텐츠 추천에서 그치지 않고, 필요하면 시스템이 먼저 말을 거는 선제 접촉까지 이어집니다.</a:t>
             </a:r>
             <a:endParaRPr lang="en-US" sz="1100" dirty="0"/>
           </a:p>
@@ -11377,7 +11377,7 @@
                 <a:ea typeface="Noto Sans KR DemiLight" pitchFamily="34" charset="-122"/>
                 <a:cs typeface="Noto Sans KR DemiLight" pitchFamily="34" charset="-120"/>
               </a:rPr>
-              <a:t>연속 이탈 3일 → 조건 6개 검사 → 첫 발화 생성 → 세션 선생성 → FCM 푸시 · 홈 카드 · 배너로 사용자에게 닿습니다</a:t>
+              <a:t>연속 이탈 3일 → 조건 6개 검사 → 첫 발화 생성 → 세션 선생성 → FCM 푸시 · 홈 카드 · 배너로 먼저 말을 겁니다</a:t>
             </a:r>
             <a:endParaRPr lang="en-US" sz="1150" dirty="0"/>
           </a:p>
@@ -11416,7 +11416,7 @@
                 <a:ea typeface="Noto Sans KR" pitchFamily="34" charset="-122"/>
                 <a:cs typeface="Noto Sans KR" pitchFamily="34" charset="-120"/>
               </a:rPr>
-              <a:t>"감시 아닌가요?" — 장치를 마련했습니다</a:t>
+              <a:t>"감시 아닌가요?" — 그래서 장치를 마련했습니다</a:t>
             </a:r>
             <a:endParaRPr lang="en-US" sz="1400" dirty="0"/>
           </a:p>
@@ -11563,7 +11563,7 @@
                 <a:ea typeface="Noto Sans KR DemiLight" pitchFamily="34" charset="-122"/>
                 <a:cs typeface="Noto Sans KR DemiLight" pitchFamily="34" charset="-120"/>
               </a:rPr>
-              <a:t>케어 알림을 콘텐츠 알림과 따로 동의</a:t>
+              <a:t>케어 알림은 콘텐츠 알림과 따로 동의받습니다</a:t>
             </a:r>
             <a:endParaRPr lang="en-US" sz="950" dirty="0"/>
           </a:p>
@@ -11857,7 +11857,7 @@
                 <a:ea typeface="Noto Sans KR DemiLight" pitchFamily="34" charset="-122"/>
                 <a:cs typeface="Noto Sans KR DemiLight" pitchFamily="34" charset="-120"/>
               </a:rPr>
-              <a:t>같은 날 콘텐츠 알림이 있으면 보류</a:t>
+              <a:t>같은 날 콘텐츠 알림이 있으면 보류합니다</a:t>
             </a:r>
             <a:endParaRPr lang="en-US" sz="950" dirty="0"/>
           </a:p>
@@ -12004,7 +12004,7 @@
                 <a:ea typeface="Noto Sans KR DemiLight" pitchFamily="34" charset="-122"/>
                 <a:cs typeface="Noto Sans KR DemiLight" pitchFamily="34" charset="-120"/>
               </a:rPr>
-              <a:t>왜 말을 걸었는지 첫 마디에 담음</a:t>
+              <a:t>왜 말을 걸었는지 첫 마디에 담습니다</a:t>
             </a:r>
             <a:endParaRPr lang="en-US" sz="950" dirty="0"/>
           </a:p>
@@ -13428,7 +13428,7 @@
                 <a:ea typeface="Noto Sans KR" pitchFamily="34" charset="-122"/>
                 <a:cs typeface="Noto Sans KR" pitchFamily="34" charset="-120"/>
               </a:rPr>
-              <a:t>앱이 "먼저 보내는" 구조 — 서버가 끌어오지 않습니다</a:t>
+              <a:t>앱이 먼저 보내고, 서버는 끌어오지 않습니다</a:t>
             </a:r>
             <a:endParaRPr lang="en-US" sz="1450" dirty="0"/>
           </a:p>
@@ -13470,7 +13470,7 @@
                 <a:ea typeface="Noto Sans KR DemiLight" pitchFamily="34" charset="-122"/>
                 <a:cs typeface="Noto Sans KR DemiLight" pitchFamily="34" charset="-120"/>
               </a:rPr>
-              <a:t>Health Connect는 Android 단말 안의 권한 모델이라 서버가 가질 OAuth 토큰이 없습니다. 그래서 앱이 읽어 push하고, 앱을 열지 않아도 WorkManager가 15분 주기로 백그라운드 전송합니다. "왜 서버가 가져오지 않나요?"의 답 — 못 하는 것이지 안 한 것이 아닙니다.</a:t>
+              <a:t>Health Connect는 Android 단말 안의 권한 모델이라 서버가 가질 OAuth 토큰이 없습니다. 그래서 앱이 읽어 push하고, 앱을 열지 않아도 WorkManager가 15분 주기로 백그라운드 전송합니다. 서버가 안 가져오는 것이 아니라, 가져올 수가 없습니다.</a:t>
             </a:r>
             <a:endParaRPr lang="en-US" sz="1150" dirty="0"/>
           </a:p>
@@ -14083,7 +14083,7 @@
                 <a:ea typeface="Noto Sans KR DemiLight" pitchFamily="34" charset="-122"/>
                 <a:cs typeface="Noto Sans KR DemiLight" pitchFamily="34" charset="-120"/>
               </a:rPr>
-              <a:t>국내 라벨 데이터셋을 구하지 못해 공개 데이터(GLOBEM)로 검증 — ROC-AUC 0.528 (무작위 수준)</a:t>
+              <a:t>국내 라벨 데이터셋을 구하지 못해 공개 데이터(GLOBEM)로 검증했더니 ROC-AUC 0.528, 무작위 수준이었습니다</a:t>
             </a:r>
             <a:endParaRPr lang="en-US" sz="1150" dirty="0"/>
           </a:p>

--- a/documents/최종발표자료_귀기울임.pptx
+++ b/documents/최종발표자료_귀기울임.pptx
@@ -6993,20 +6993,26 @@
         </p:nvSpPr>
         <p:spPr>
           <a:xfrm>
-            <a:off x="8046720" y="2084832"/>
-            <a:ext cx="3291840" cy="365760"/>
-          </a:xfrm>
-          <a:prstGeom prst="rect">
-            <a:avLst/>
-          </a:prstGeom>
-          <a:noFill/>
-          <a:ln/>
-        </p:spPr>
-        <p:txBody>
-          <a:bodyPr wrap="square" rtlCol="0" anchor="ctr"/>
-          <a:lstStyle/>
-          <a:p>
-            <a:pPr indent="0" marL="0">
+            <a:off x="8046720" y="1874520"/>
+            <a:ext cx="3291840" cy="3072384"/>
+          </a:xfrm>
+          <a:prstGeom prst="rect">
+            <a:avLst/>
+          </a:prstGeom>
+          <a:noFill/>
+          <a:ln/>
+        </p:spPr>
+        <p:txBody>
+          <a:bodyPr wrap="square" lIns="0" tIns="0" rIns="0" bIns="0" rtlCol="0" anchor="ctr"/>
+          <a:lstStyle/>
+          <a:p>
+            <a:pPr indent="0" marL="0">
+              <a:lnSpc>
+                <a:spcPct val="130000"/>
+              </a:lnSpc>
+              <a:spcAft>
+                <a:spcPts val="1200"/>
+              </a:spcAft>
               <a:buNone/>
             </a:pPr>
             <a:r>
@@ -7020,35 +7026,16 @@
               </a:rPr>
               <a:t>왜 전 컬럼 암호화를 하지 않았나</a:t>
             </a:r>
-            <a:endParaRPr lang="en-US" sz="1300" dirty="0"/>
-          </a:p>
-        </p:txBody>
-      </p:sp>
-      <p:sp>
-        <p:nvSpPr>
-          <p:cNvPr id="30" name="Text 28"/>
-          <p:cNvSpPr/>
-          <p:nvPr/>
-        </p:nvSpPr>
-        <p:spPr>
-          <a:xfrm>
-            <a:off x="8046720" y="2487168"/>
-            <a:ext cx="3291840" cy="1051560"/>
-          </a:xfrm>
-          <a:prstGeom prst="rect">
-            <a:avLst/>
-          </a:prstGeom>
-          <a:noFill/>
-          <a:ln/>
-        </p:spPr>
-        <p:txBody>
-          <a:bodyPr wrap="square" rtlCol="0" anchor="ctr"/>
-          <a:lstStyle/>
+            <a:endParaRPr lang="en-US" sz="1050" dirty="0"/>
+          </a:p>
           <a:p>
             <a:pPr indent="0" marL="0">
               <a:lnSpc>
                 <a:spcPct val="130000"/>
               </a:lnSpc>
+              <a:spcAft>
+                <a:spcPts val="1200"/>
+              </a:spcAft>
               <a:buNone/>
             </a:pPr>
             <a:r>
@@ -7064,28 +7051,6 @@
             </a:r>
             <a:endParaRPr lang="en-US" sz="1050" dirty="0"/>
           </a:p>
-        </p:txBody>
-      </p:sp>
-      <p:sp>
-        <p:nvSpPr>
-          <p:cNvPr id="31" name="Text 29"/>
-          <p:cNvSpPr/>
-          <p:nvPr/>
-        </p:nvSpPr>
-        <p:spPr>
-          <a:xfrm>
-            <a:off x="8046720" y="3611880"/>
-            <a:ext cx="3291840" cy="1463040"/>
-          </a:xfrm>
-          <a:prstGeom prst="rect">
-            <a:avLst/>
-          </a:prstGeom>
-          <a:noFill/>
-          <a:ln/>
-        </p:spPr>
-        <p:txBody>
-          <a:bodyPr wrap="square" rtlCol="0" anchor="ctr"/>
-          <a:lstStyle/>
           <a:p>
             <a:pPr indent="0" marL="0">
               <a:lnSpc>
@@ -7110,7 +7075,7 @@
       </p:sp>
       <p:sp>
         <p:nvSpPr>
-          <p:cNvPr id="32" name="Shape 30"/>
+          <p:cNvPr id="30" name="Shape 28"/>
           <p:cNvSpPr/>
           <p:nvPr/>
         </p:nvSpPr>
@@ -7132,7 +7097,7 @@
       </p:sp>
       <p:sp>
         <p:nvSpPr>
-          <p:cNvPr id="33" name="Text 31"/>
+          <p:cNvPr id="31" name="Text 29"/>
           <p:cNvSpPr/>
           <p:nvPr/>
         </p:nvSpPr>
@@ -7208,7 +7173,7 @@
       </p:sp>
       <p:sp>
         <p:nvSpPr>
-          <p:cNvPr id="34" name="Text 32"/>
+          <p:cNvPr id="32" name="Text 30"/>
           <p:cNvSpPr/>
           <p:nvPr/>
         </p:nvSpPr>
@@ -7247,7 +7212,7 @@
       </p:sp>
       <p:sp>
         <p:nvSpPr>
-          <p:cNvPr id="35" name="Text 33"/>
+          <p:cNvPr id="33" name="Text 31"/>
           <p:cNvSpPr/>
           <p:nvPr/>
         </p:nvSpPr>
@@ -7419,6 +7384,13 @@
             </a:solidFill>
             <a:prstDash val="solid"/>
           </a:ln>
+          <a:effectLst>
+            <a:outerShdw sx="100000" sy="100000" kx="0" ky="0" algn="bl" rotWithShape="0" blurRad="127000" dist="38100" dir="5400000">
+              <a:srgbClr val="1B2547">
+                <a:alpha val="10000"/>
+              </a:srgbClr>
+            </a:outerShdw>
+          </a:effectLst>
         </p:spPr>
       </p:sp>
       <p:sp>
@@ -7588,6 +7560,13 @@
             </a:solidFill>
             <a:prstDash val="solid"/>
           </a:ln>
+          <a:effectLst>
+            <a:outerShdw sx="100000" sy="100000" kx="0" ky="0" algn="bl" rotWithShape="0" blurRad="127000" dist="38100" dir="5400000">
+              <a:srgbClr val="1B2547">
+                <a:alpha val="10000"/>
+              </a:srgbClr>
+            </a:outerShdw>
+          </a:effectLst>
         </p:spPr>
       </p:sp>
       <p:sp>
@@ -7757,6 +7736,13 @@
             </a:solidFill>
             <a:prstDash val="solid"/>
           </a:ln>
+          <a:effectLst>
+            <a:outerShdw sx="100000" sy="100000" kx="0" ky="0" algn="bl" rotWithShape="0" blurRad="127000" dist="38100" dir="5400000">
+              <a:srgbClr val="1B2547">
+                <a:alpha val="10000"/>
+              </a:srgbClr>
+            </a:outerShdw>
+          </a:effectLst>
         </p:spPr>
       </p:sp>
       <p:sp>
@@ -7926,6 +7912,13 @@
             </a:solidFill>
             <a:prstDash val="solid"/>
           </a:ln>
+          <a:effectLst>
+            <a:outerShdw sx="100000" sy="100000" kx="0" ky="0" algn="bl" rotWithShape="0" blurRad="127000" dist="38100" dir="5400000">
+              <a:srgbClr val="1B2547">
+                <a:alpha val="10000"/>
+              </a:srgbClr>
+            </a:outerShdw>
+          </a:effectLst>
         </p:spPr>
       </p:sp>
       <p:sp>
@@ -8095,6 +8088,13 @@
             </a:solidFill>
             <a:prstDash val="solid"/>
           </a:ln>
+          <a:effectLst>
+            <a:outerShdw sx="100000" sy="100000" kx="0" ky="0" algn="bl" rotWithShape="0" blurRad="127000" dist="38100" dir="5400000">
+              <a:srgbClr val="1B2547">
+                <a:alpha val="10000"/>
+              </a:srgbClr>
+            </a:outerShdw>
+          </a:effectLst>
         </p:spPr>
       </p:sp>
       <p:sp>
@@ -8264,6 +8264,13 @@
             </a:solidFill>
             <a:prstDash val="solid"/>
           </a:ln>
+          <a:effectLst>
+            <a:outerShdw sx="100000" sy="100000" kx="0" ky="0" algn="bl" rotWithShape="0" blurRad="127000" dist="38100" dir="5400000">
+              <a:srgbClr val="1B2547">
+                <a:alpha val="10000"/>
+              </a:srgbClr>
+            </a:outerShdw>
+          </a:effectLst>
         </p:spPr>
       </p:sp>
       <p:sp>

--- a/documents/최종발표자료_귀기울임.pptx
+++ b/documents/최종발표자료_귀기울임.pptx
@@ -4806,7 +4806,7 @@
                 <a:ea typeface="Noto Sans KR" pitchFamily="34" charset="-122"/>
                 <a:cs typeface="Noto Sans KR" pitchFamily="34" charset="-120"/>
               </a:rPr>
-              <a:t>319건</a:t>
+              <a:t>322건</a:t>
             </a:r>
             <a:endParaRPr lang="en-US" sz="2400" dirty="0"/>
           </a:p>
@@ -4868,7 +4868,7 @@
                 <a:ea typeface="Noto Sans KR DemiLight" pitchFamily="34" charset="-122"/>
                 <a:cs typeface="Noto Sans KR DemiLight" pitchFamily="34" charset="-120"/>
               </a:rPr>
-              <a:t>백엔드 118 · AI 22 · 앱 165 · 관리자 14</a:t>
+              <a:t>백엔드 121 · AI 22 · 앱 165 · 관리자 14</a:t>
             </a:r>
             <a:endParaRPr lang="en-US" sz="900" dirty="0"/>
           </a:p>

--- a/documents/최종발표자료_귀기울임.pptx
+++ b/documents/최종발표자료_귀기울임.pptx
@@ -7353,7 +7353,7 @@
                 <a:ea typeface="Noto Sans KR" pitchFamily="34" charset="-122"/>
                 <a:cs typeface="Noto Sans KR" pitchFamily="34" charset="-120"/>
               </a:rPr>
-              <a:t>못 한 부분은 그대로 말씀드리겠습니다</a:t>
+              <a:t>남은 부분도 정확히 말씀드리겠습니다</a:t>
             </a:r>
             <a:endParaRPr lang="en-US" sz="3000" dirty="0"/>
           </a:p>
@@ -7954,7 +7954,7 @@
                 <a:ea typeface="Noto Sans KR" pitchFamily="34" charset="-122"/>
                 <a:cs typeface="Noto Sans KR" pitchFamily="34" charset="-120"/>
               </a:rPr>
-              <a:t>배포 인프라</a:t>
+              <a:t>평가셋 holdout</a:t>
             </a:r>
             <a:endParaRPr lang="en-US" sz="1300" dirty="0"/>
           </a:p>
@@ -8015,7 +8015,7 @@
                 <a:ea typeface="Noto Sans KR" pitchFamily="34" charset="-122"/>
                 <a:cs typeface="Noto Sans KR" pitchFamily="34" charset="-120"/>
               </a:rPr>
-              <a:t>미정</a:t>
+              <a:t>없음</a:t>
             </a:r>
             <a:endParaRPr lang="en-US" sz="950" dirty="0"/>
           </a:p>
@@ -8057,7 +8057,7 @@
                 <a:ea typeface="Noto Sans KR DemiLight" pitchFamily="34" charset="-122"/>
                 <a:cs typeface="Noto Sans KR DemiLight" pitchFamily="34" charset="-120"/>
               </a:rPr>
-              <a:t>지금은 로컬 데모 구조입니다. 클라우드 배포는 다음 단계 과제입니다.</a:t>
+              <a:t>0.946은 이 평가셋 211건에서 나온 값입니다. 새 문장으로는 다시 검증하지 않았습니다.</a:t>
             </a:r>
             <a:endParaRPr lang="en-US" sz="1050" dirty="0"/>
           </a:p>
@@ -8130,7 +8130,7 @@
                 <a:ea typeface="Noto Sans KR" pitchFamily="34" charset="-122"/>
                 <a:cs typeface="Noto Sans KR" pitchFamily="34" charset="-120"/>
               </a:rPr>
-              <a:t>평가셋 holdout</a:t>
+              <a:t>놓친 6건</a:t>
             </a:r>
             <a:endParaRPr lang="en-US" sz="1300" dirty="0"/>
           </a:p>
@@ -8153,7 +8153,7 @@
             </a:avLst>
           </a:prstGeom>
           <a:solidFill>
-            <a:srgbClr val="FFF0E9"/>
+            <a:srgbClr val="EAF8F4"/>
           </a:solidFill>
           <a:ln/>
         </p:spPr>
@@ -8185,13 +8185,13 @@
             <a:r>
               <a:rPr lang="en-US" sz="950" b="1" dirty="0">
                 <a:solidFill>
-                  <a:srgbClr val="C97448"/>
+                  <a:srgbClr val="2F9E82"/>
                 </a:solidFill>
                 <a:latin typeface="Noto Sans KR" pitchFamily="34" charset="0"/>
                 <a:ea typeface="Noto Sans KR" pitchFamily="34" charset="-122"/>
                 <a:cs typeface="Noto Sans KR" pitchFamily="34" charset="-120"/>
               </a:rPr>
-              <a:t>없음</a:t>
+              <a:t>분석 완료</a:t>
             </a:r>
             <a:endParaRPr lang="en-US" sz="950" dirty="0"/>
           </a:p>
@@ -8233,7 +8233,7 @@
                 <a:ea typeface="Noto Sans KR DemiLight" pitchFamily="34" charset="-122"/>
                 <a:cs typeface="Noto Sans KR DemiLight" pitchFamily="34" charset="-120"/>
               </a:rPr>
-              <a:t>0.946은 이 평가셋 211건에서 나온 값입니다. 새 문장으로는 다시 검증하지 않았습니다.</a:t>
+              <a:t>완곡·작별·신변 정리 표현에 몰려 있고, 문장 하나만으로는 사람도 라벨이 갈립니다.</a:t>
             </a:r>
             <a:endParaRPr lang="en-US" sz="1050" dirty="0"/>
           </a:p>
@@ -8241,213 +8241,37 @@
       </p:sp>
       <p:sp>
         <p:nvSpPr>
-          <p:cNvPr id="29" name="Shape 27"/>
-          <p:cNvSpPr/>
-          <p:nvPr/>
-        </p:nvSpPr>
-        <p:spPr>
-          <a:xfrm>
-            <a:off x="548640" y="5440680"/>
-            <a:ext cx="11064240" cy="640080"/>
-          </a:xfrm>
-          <a:prstGeom prst="roundRect">
-            <a:avLst>
-              <a:gd name="adj" fmla="val 12857"/>
-            </a:avLst>
-          </a:prstGeom>
-          <a:solidFill>
-            <a:srgbClr val="FFFFFF"/>
-          </a:solidFill>
-          <a:ln w="12700">
-            <a:solidFill>
-              <a:srgbClr val="E3E7F3"/>
-            </a:solidFill>
-            <a:prstDash val="solid"/>
-          </a:ln>
-          <a:effectLst>
-            <a:outerShdw sx="100000" sy="100000" kx="0" ky="0" algn="bl" rotWithShape="0" blurRad="127000" dist="38100" dir="5400000">
-              <a:srgbClr val="1B2547">
-                <a:alpha val="10000"/>
-              </a:srgbClr>
-            </a:outerShdw>
-          </a:effectLst>
-        </p:spPr>
-      </p:sp>
-      <p:sp>
-        <p:nvSpPr>
-          <p:cNvPr id="30" name="Text 28"/>
-          <p:cNvSpPr/>
-          <p:nvPr/>
-        </p:nvSpPr>
-        <p:spPr>
-          <a:xfrm>
-            <a:off x="822960" y="5440680"/>
-            <a:ext cx="2834640" cy="640080"/>
-          </a:xfrm>
-          <a:prstGeom prst="rect">
-            <a:avLst/>
-          </a:prstGeom>
-          <a:noFill/>
-          <a:ln/>
-        </p:spPr>
-        <p:txBody>
-          <a:bodyPr wrap="square" lIns="0" tIns="0" rIns="0" bIns="0" rtlCol="0" anchor="ctr"/>
-          <a:lstStyle/>
-          <a:p>
-            <a:pPr indent="0" marL="0">
-              <a:buNone/>
-            </a:pPr>
-            <a:r>
-              <a:rPr lang="en-US" sz="1300" b="1" dirty="0">
-                <a:solidFill>
-                  <a:srgbClr val="24325F"/>
-                </a:solidFill>
-                <a:latin typeface="Noto Sans KR" pitchFamily="34" charset="0"/>
-                <a:ea typeface="Noto Sans KR" pitchFamily="34" charset="-122"/>
-                <a:cs typeface="Noto Sans KR" pitchFamily="34" charset="-120"/>
-              </a:rPr>
-              <a:t>놓친 6건</a:t>
-            </a:r>
-            <a:endParaRPr lang="en-US" sz="1300" dirty="0"/>
-          </a:p>
-        </p:txBody>
-      </p:sp>
-      <p:sp>
-        <p:nvSpPr>
-          <p:cNvPr id="31" name="Shape 29"/>
-          <p:cNvSpPr/>
-          <p:nvPr/>
-        </p:nvSpPr>
-        <p:spPr>
-          <a:xfrm>
-            <a:off x="3703320" y="5586984"/>
-            <a:ext cx="1051560" cy="347472"/>
-          </a:xfrm>
-          <a:prstGeom prst="roundRect">
-            <a:avLst>
-              <a:gd name="adj" fmla="val 50000"/>
-            </a:avLst>
-          </a:prstGeom>
-          <a:solidFill>
-            <a:srgbClr val="EAF8F4"/>
-          </a:solidFill>
-          <a:ln/>
-        </p:spPr>
-      </p:sp>
-      <p:sp>
-        <p:nvSpPr>
-          <p:cNvPr id="32" name="Text 30"/>
-          <p:cNvSpPr/>
-          <p:nvPr/>
-        </p:nvSpPr>
-        <p:spPr>
-          <a:xfrm>
-            <a:off x="3703320" y="5586984"/>
-            <a:ext cx="1051560" cy="347472"/>
-          </a:xfrm>
-          <a:prstGeom prst="rect">
-            <a:avLst/>
-          </a:prstGeom>
-          <a:noFill/>
-          <a:ln/>
-        </p:spPr>
-        <p:txBody>
-          <a:bodyPr wrap="square" lIns="0" tIns="0" rIns="0" bIns="0" rtlCol="0" anchor="ctr"/>
-          <a:lstStyle/>
-          <a:p>
-            <a:pPr algn="ctr" indent="0" marL="0">
-              <a:buNone/>
-            </a:pPr>
-            <a:r>
-              <a:rPr lang="en-US" sz="950" b="1" dirty="0">
-                <a:solidFill>
-                  <a:srgbClr val="2F9E82"/>
-                </a:solidFill>
-                <a:latin typeface="Noto Sans KR" pitchFamily="34" charset="0"/>
-                <a:ea typeface="Noto Sans KR" pitchFamily="34" charset="-122"/>
-                <a:cs typeface="Noto Sans KR" pitchFamily="34" charset="-120"/>
-              </a:rPr>
-              <a:t>분석 완료</a:t>
-            </a:r>
-            <a:endParaRPr lang="en-US" sz="950" dirty="0"/>
-          </a:p>
-        </p:txBody>
-      </p:sp>
-      <p:sp>
-        <p:nvSpPr>
-          <p:cNvPr id="33" name="Text 31"/>
-          <p:cNvSpPr/>
-          <p:nvPr/>
-        </p:nvSpPr>
-        <p:spPr>
-          <a:xfrm>
-            <a:off x="4937760" y="5440680"/>
-            <a:ext cx="6492240" cy="640080"/>
-          </a:xfrm>
-          <a:prstGeom prst="rect">
-            <a:avLst/>
-          </a:prstGeom>
-          <a:noFill/>
-          <a:ln/>
-        </p:spPr>
-        <p:txBody>
-          <a:bodyPr wrap="square" lIns="0" tIns="0" rIns="0" bIns="0" rtlCol="0" anchor="ctr"/>
-          <a:lstStyle/>
-          <a:p>
-            <a:pPr indent="0" marL="0">
-              <a:lnSpc>
-                <a:spcPct val="120000"/>
-              </a:lnSpc>
-              <a:buNone/>
-            </a:pPr>
-            <a:r>
-              <a:rPr lang="en-US" sz="1050" dirty="0">
-                <a:solidFill>
-                  <a:srgbClr val="6E7488"/>
+          <p:cNvPr id="29" name="Text 27"/>
+          <p:cNvSpPr/>
+          <p:nvPr/>
+        </p:nvSpPr>
+        <p:spPr>
+          <a:xfrm>
+            <a:off x="11277295" y="6355080"/>
+            <a:ext cx="548640" cy="320040"/>
+          </a:xfrm>
+          <a:prstGeom prst="rect">
+            <a:avLst/>
+          </a:prstGeom>
+          <a:noFill/>
+          <a:ln/>
+        </p:spPr>
+        <p:txBody>
+          <a:bodyPr wrap="square" rtlCol="0" anchor="ctr"/>
+          <a:lstStyle/>
+          <a:p>
+            <a:pPr algn="r" indent="0" marL="0">
+              <a:buNone/>
+            </a:pPr>
+            <a:r>
+              <a:rPr lang="en-US" sz="1000" dirty="0">
+                <a:solidFill>
+                  <a:srgbClr val="B7BCCB"/>
                 </a:solidFill>
                 <a:latin typeface="Noto Sans KR DemiLight" pitchFamily="34" charset="0"/>
                 <a:ea typeface="Noto Sans KR DemiLight" pitchFamily="34" charset="-122"/>
                 <a:cs typeface="Noto Sans KR DemiLight" pitchFamily="34" charset="-120"/>
               </a:rPr>
-              <a:t>완곡·작별·신변 정리 표현에 몰려 있고, 문장 하나만으로는 사람도 라벨이 갈립니다.</a:t>
-            </a:r>
-            <a:endParaRPr lang="en-US" sz="1050" dirty="0"/>
-          </a:p>
-        </p:txBody>
-      </p:sp>
-      <p:sp>
-        <p:nvSpPr>
-          <p:cNvPr id="34" name="Text 32"/>
-          <p:cNvSpPr/>
-          <p:nvPr/>
-        </p:nvSpPr>
-        <p:spPr>
-          <a:xfrm>
-            <a:off x="11277295" y="6355080"/>
-            <a:ext cx="548640" cy="320040"/>
-          </a:xfrm>
-          <a:prstGeom prst="rect">
-            <a:avLst/>
-          </a:prstGeom>
-          <a:noFill/>
-          <a:ln/>
-        </p:spPr>
-        <p:txBody>
-          <a:bodyPr wrap="square" rtlCol="0" anchor="ctr"/>
-          <a:lstStyle/>
-          <a:p>
-            <a:pPr algn="r" indent="0" marL="0">
-              <a:buNone/>
-            </a:pPr>
-            <a:r>
-              <a:rPr lang="en-US" sz="1000" dirty="0">
-                <a:solidFill>
-                  <a:srgbClr val="B7BCCB"/>
-                </a:solidFill>
-                <a:latin typeface="Noto Sans KR DemiLight" pitchFamily="34" charset="0"/>
-                <a:ea typeface="Noto Sans KR DemiLight" pitchFamily="34" charset="-122"/>
-                <a:cs typeface="Noto Sans KR DemiLight" pitchFamily="34" charset="-120"/>
-              </a:rPr>
               <a:t>14</a:t>
             </a:r>
             <a:endParaRPr lang="en-US" sz="1000" dirty="0"/>
@@ -8456,7 +8280,7 @@
       </p:sp>
       <p:sp>
         <p:nvSpPr>
-          <p:cNvPr id="35" name="Text 33"/>
+          <p:cNvPr id="30" name="Text 28"/>
           <p:cNvSpPr/>
           <p:nvPr/>
         </p:nvSpPr>
@@ -13530,7 +13354,7 @@
                 <a:ea typeface="Noto Sans KR DemiLight" pitchFamily="34" charset="-122"/>
                 <a:cs typeface="Noto Sans KR DemiLight" pitchFamily="34" charset="-120"/>
               </a:rPr>
-              <a:t>Flutter · Health Connect · WorkManager   |   FastAPI · SQLAlchemy · PostgreSQL 17   |   React · Vite   |   OpenAI API   |   인프라: 로컬 데모</a:t>
+              <a:t>Flutter · Health Connect · WorkManager   |   FastAPI · SQLAlchemy · PostgreSQL 17   |   React · Vite   |   OpenAI API   |   인프라: NCP + Docker Compose</a:t>
             </a:r>
             <a:endParaRPr lang="en-US" sz="1000" dirty="0"/>
           </a:p>

--- a/documents/최종발표자료_귀기울임.pptx
+++ b/documents/최종발표자료_귀기울임.pptx
@@ -2767,7 +2767,7 @@
                 <a:ea typeface="Noto Sans KR" pitchFamily="34" charset="-122"/>
                 <a:cs typeface="Noto Sans KR" pitchFamily="34" charset="-120"/>
               </a:rPr>
-              <a:t>위기 탐지는 2단계입니다</a:t>
+              <a:t>위기 탐지 2단계 구조</a:t>
             </a:r>
             <a:endParaRPr lang="en-US" sz="3000" dirty="0"/>
           </a:p>
@@ -5349,7 +5349,7 @@
                 <a:ea typeface="Noto Sans KR" pitchFamily="34" charset="-122"/>
                 <a:cs typeface="Noto Sans KR" pitchFamily="34" charset="-120"/>
               </a:rPr>
-              <a:t>관리자는 위험한 사람부터 봅니다</a:t>
+              <a:t>위험한 사람부터 보이는 관제 화면</a:t>
             </a:r>
             <a:endParaRPr lang="en-US" sz="3000" dirty="0"/>
           </a:p>
@@ -6095,7 +6095,7 @@
                 <a:ea typeface="Noto Sans KR" pitchFamily="34" charset="-122"/>
                 <a:cs typeface="Noto Sans KR" pitchFamily="34" charset="-120"/>
               </a:rPr>
-              <a:t>"전부 암호화"가 아니라 위험도 기반입니다</a:t>
+              <a:t>"전부 암호화" 대신 위험도 기반</a:t>
             </a:r>
             <a:endParaRPr lang="en-US" sz="3000" dirty="0"/>
           </a:p>
@@ -9917,7 +9917,7 @@
                 <a:ea typeface="Noto Sans KR" pitchFamily="34" charset="-122"/>
                 <a:cs typeface="Noto Sans KR" pitchFamily="34" charset="-120"/>
               </a:rPr>
-              <a:t>데이터는 쌓이는데, 사용자는 앱을 열지 않습니다</a:t>
+              <a:t>쌓이는 데이터, 열리지 않는 앱</a:t>
             </a:r>
             <a:endParaRPr lang="en-US" sz="3000" dirty="0"/>
           </a:p>
@@ -13542,7 +13542,7 @@
                 <a:ea typeface="Noto Sans KR" pitchFamily="34" charset="-122"/>
                 <a:cs typeface="Noto Sans KR" pitchFamily="34" charset="-120"/>
               </a:rPr>
-              <a:t>감정 분류 모델은 검증하고 접었습니다</a:t>
+              <a:t>왜 감정 분류 대신 이탈 탐지인가</a:t>
             </a:r>
             <a:endParaRPr lang="en-US" sz="3000" dirty="0"/>
           </a:p>

--- a/documents/최종발표자료_귀기울임.pptx
+++ b/documents/최종발표자료_귀기울임.pptx
@@ -3880,7 +3880,7 @@
                 <a:ea typeface="Noto Sans KR" pitchFamily="34" charset="-122"/>
                 <a:cs typeface="Noto Sans KR" pitchFamily="34" charset="-120"/>
               </a:rPr>
-              <a:t>RESULTS &amp; LIMITS</a:t>
+              <a:t>RESULTS &amp; NEXT STEPS</a:t>
             </a:r>
             <a:endParaRPr lang="en-US" sz="1200" dirty="0"/>
           </a:p>
@@ -3919,7 +3919,7 @@
                 <a:ea typeface="Noto Sans KR Black" pitchFamily="34" charset="-122"/>
                 <a:cs typeface="Noto Sans KR Black" pitchFamily="34" charset="-120"/>
               </a:rPr>
-              <a:t>성과와 한계</a:t>
+              <a:t>성과와 확장</a:t>
             </a:r>
             <a:endParaRPr lang="en-US" sz="3400" dirty="0"/>
           </a:p>
@@ -4107,7 +4107,7 @@
                 <a:ea typeface="Noto Sans KR" pitchFamily="34" charset="-122"/>
                 <a:cs typeface="Noto Sans KR" pitchFamily="34" charset="-120"/>
               </a:rPr>
-              <a:t>실측으로 증명한 것만 남겼습니다</a:t>
+              <a:t>실측으로 증명된 수치</a:t>
             </a:r>
             <a:endParaRPr lang="en-US" sz="3000" dirty="0"/>
           </a:p>
@@ -4600,7 +4600,7 @@
                 <a:ea typeface="Noto Sans KR" pitchFamily="34" charset="-122"/>
                 <a:cs typeface="Noto Sans KR" pitchFamily="34" charset="-120"/>
               </a:rPr>
-              <a:t>33개</a:t>
+              <a:t>34개</a:t>
             </a:r>
             <a:endParaRPr lang="en-US" sz="2400" dirty="0"/>
           </a:p>
@@ -4806,7 +4806,7 @@
                 <a:ea typeface="Noto Sans KR" pitchFamily="34" charset="-122"/>
                 <a:cs typeface="Noto Sans KR" pitchFamily="34" charset="-120"/>
               </a:rPr>
-              <a:t>322건</a:t>
+              <a:t>332건</a:t>
             </a:r>
             <a:endParaRPr lang="en-US" sz="2400" dirty="0"/>
           </a:p>
@@ -4868,7 +4868,7 @@
                 <a:ea typeface="Noto Sans KR DemiLight" pitchFamily="34" charset="-122"/>
                 <a:cs typeface="Noto Sans KR DemiLight" pitchFamily="34" charset="-120"/>
               </a:rPr>
-              <a:t>백엔드 121 · AI 22 · 앱 165 · 관리자 14</a:t>
+              <a:t>백엔드 131 · AI 22 · 앱 165 · 관리자 14</a:t>
             </a:r>
             <a:endParaRPr lang="en-US" sz="900" dirty="0"/>
           </a:p>
@@ -7314,7 +7314,7 @@
                 <a:ea typeface="Noto Sans KR" pitchFamily="34" charset="-122"/>
                 <a:cs typeface="Noto Sans KR" pitchFamily="34" charset="-120"/>
               </a:rPr>
-              <a:t>HONEST STATUS</a:t>
+              <a:t>NEXT STEPS</a:t>
             </a:r>
             <a:endParaRPr lang="en-US" sz="1200" dirty="0"/>
           </a:p>
@@ -7353,7 +7353,7 @@
                 <a:ea typeface="Noto Sans KR" pitchFamily="34" charset="-122"/>
                 <a:cs typeface="Noto Sans KR" pitchFamily="34" charset="-120"/>
               </a:rPr>
-              <a:t>남은 부분도 정확히 말씀드리겠습니다</a:t>
+              <a:t>확장 가능한 부분</a:t>
             </a:r>
             <a:endParaRPr lang="en-US" sz="3000" dirty="0"/>
           </a:p>
@@ -7426,7 +7426,7 @@
                 <a:ea typeface="Noto Sans KR" pitchFamily="34" charset="-122"/>
                 <a:cs typeface="Noto Sans KR" pitchFamily="34" charset="-120"/>
               </a:rPr>
-              <a:t>Health Connect 실기기 검증</a:t>
+              <a:t>Health Connect 실기기</a:t>
             </a:r>
             <a:endParaRPr lang="en-US" sz="1300" dirty="0"/>
           </a:p>
@@ -7487,7 +7487,7 @@
                 <a:ea typeface="Noto Sans KR" pitchFamily="34" charset="-122"/>
                 <a:cs typeface="Noto Sans KR" pitchFamily="34" charset="-120"/>
               </a:rPr>
-              <a:t>남음</a:t>
+              <a:t>검증 예정</a:t>
             </a:r>
             <a:endParaRPr lang="en-US" sz="950" dirty="0"/>
           </a:p>
@@ -7529,7 +7529,7 @@
                 <a:ea typeface="Noto Sans KR DemiLight" pitchFamily="34" charset="-122"/>
                 <a:cs typeface="Noto Sans KR DemiLight" pitchFamily="34" charset="-120"/>
               </a:rPr>
-              <a:t>에뮬레이터에는 Health Connect가 없어 워커 동작만 확인했습니다.</a:t>
+              <a:t>에뮬레이터에서 워커 동작까지 확인했습니다. 실기기만 확보되면 바로 검증합니다.</a:t>
             </a:r>
             <a:endParaRPr lang="en-US" sz="1050" dirty="0"/>
           </a:p>
@@ -7602,7 +7602,7 @@
                 <a:ea typeface="Noto Sans KR" pitchFamily="34" charset="-122"/>
                 <a:cs typeface="Noto Sans KR" pitchFamily="34" charset="-120"/>
               </a:rPr>
-              <a:t>미수신 감지 스케줄러</a:t>
+              <a:t>iOS 확장</a:t>
             </a:r>
             <a:endParaRPr lang="en-US" sz="1300" dirty="0"/>
           </a:p>
@@ -7625,7 +7625,7 @@
             </a:avLst>
           </a:prstGeom>
           <a:solidFill>
-            <a:srgbClr val="FFF0E9"/>
+            <a:srgbClr val="EAF5FF"/>
           </a:solidFill>
           <a:ln/>
         </p:spPr>
@@ -7657,13 +7657,13 @@
             <a:r>
               <a:rPr lang="en-US" sz="950" b="1" dirty="0">
                 <a:solidFill>
-                  <a:srgbClr val="C97448"/>
+                  <a:srgbClr val="3F7FC1"/>
                 </a:solidFill>
                 <a:latin typeface="Noto Sans KR" pitchFamily="34" charset="0"/>
                 <a:ea typeface="Noto Sans KR" pitchFamily="34" charset="-122"/>
                 <a:cs typeface="Noto Sans KR" pitchFamily="34" charset="-120"/>
               </a:rPr>
-              <a:t>남음</a:t>
+              <a:t>설계 반영</a:t>
             </a:r>
             <a:endParaRPr lang="en-US" sz="950" dirty="0"/>
           </a:p>
@@ -7705,7 +7705,7 @@
                 <a:ea typeface="Noto Sans KR DemiLight" pitchFamily="34" charset="-122"/>
                 <a:cs typeface="Noto Sans KR DemiLight" pitchFamily="34" charset="-120"/>
               </a:rPr>
-              <a:t>NFR-DV-002 의 3시간 미갱신 감지입니다. 이걸 주기적으로 돌려 줄 주체를 아직 두지 않았습니다.</a:t>
+              <a:t>health 패키지가 HealthKit도 감쌉니다. 수집 계층을 그대로 재사용할 수 있게 설계했습니다.</a:t>
             </a:r>
             <a:endParaRPr lang="en-US" sz="1050" dirty="0"/>
           </a:p>
@@ -7778,7 +7778,7 @@
                 <a:ea typeface="Noto Sans KR" pitchFamily="34" charset="-122"/>
                 <a:cs typeface="Noto Sans KR" pitchFamily="34" charset="-120"/>
               </a:rPr>
-              <a:t>iOS</a:t>
+              <a:t>평가셋 확장</a:t>
             </a:r>
             <a:endParaRPr lang="en-US" sz="1300" dirty="0"/>
           </a:p>
@@ -7801,7 +7801,7 @@
             </a:avLst>
           </a:prstGeom>
           <a:solidFill>
-            <a:srgbClr val="EAF5FF"/>
+            <a:srgbClr val="FFF0E9"/>
           </a:solidFill>
           <a:ln/>
         </p:spPr>
@@ -7833,13 +7833,13 @@
             <a:r>
               <a:rPr lang="en-US" sz="950" b="1" dirty="0">
                 <a:solidFill>
-                  <a:srgbClr val="3F7FC1"/>
+                  <a:srgbClr val="C97448"/>
                 </a:solidFill>
                 <a:latin typeface="Noto Sans KR" pitchFamily="34" charset="0"/>
                 <a:ea typeface="Noto Sans KR" pitchFamily="34" charset="-122"/>
                 <a:cs typeface="Noto Sans KR" pitchFamily="34" charset="-120"/>
               </a:rPr>
-              <a:t>범위 제외</a:t>
+              <a:t>다음 단계</a:t>
             </a:r>
             <a:endParaRPr lang="en-US" sz="950" dirty="0"/>
           </a:p>
@@ -7881,7 +7881,7 @@
                 <a:ea typeface="Noto Sans KR DemiLight" pitchFamily="34" charset="-122"/>
                 <a:cs typeface="Noto Sans KR DemiLight" pitchFamily="34" charset="-120"/>
               </a:rPr>
-              <a:t>기술적으로 불가능한 것은 아닙니다. macOS·Xcode·Apple 계정 등 장비와 일정 문제입니다.</a:t>
+              <a:t>0.946은 평가셋 211건 기준입니다. 새 문장을 더해 일반화를 재검증합니다.</a:t>
             </a:r>
             <a:endParaRPr lang="en-US" sz="1050" dirty="0"/>
           </a:p>
@@ -7954,7 +7954,7 @@
                 <a:ea typeface="Noto Sans KR" pitchFamily="34" charset="-122"/>
                 <a:cs typeface="Noto Sans KR" pitchFamily="34" charset="-120"/>
               </a:rPr>
-              <a:t>평가셋 holdout</a:t>
+              <a:t>미탐 6건</a:t>
             </a:r>
             <a:endParaRPr lang="en-US" sz="1300" dirty="0"/>
           </a:p>
@@ -7977,7 +7977,7 @@
             </a:avLst>
           </a:prstGeom>
           <a:solidFill>
-            <a:srgbClr val="FFF0E9"/>
+            <a:srgbClr val="EAF8F4"/>
           </a:solidFill>
           <a:ln/>
         </p:spPr>
@@ -8009,13 +8009,13 @@
             <a:r>
               <a:rPr lang="en-US" sz="950" b="1" dirty="0">
                 <a:solidFill>
-                  <a:srgbClr val="C97448"/>
+                  <a:srgbClr val="2F9E82"/>
                 </a:solidFill>
                 <a:latin typeface="Noto Sans KR" pitchFamily="34" charset="0"/>
                 <a:ea typeface="Noto Sans KR" pitchFamily="34" charset="-122"/>
                 <a:cs typeface="Noto Sans KR" pitchFamily="34" charset="-120"/>
               </a:rPr>
-              <a:t>없음</a:t>
+              <a:t>패턴 분석 완료</a:t>
             </a:r>
             <a:endParaRPr lang="en-US" sz="950" dirty="0"/>
           </a:p>
@@ -8057,7 +8057,7 @@
                 <a:ea typeface="Noto Sans KR DemiLight" pitchFamily="34" charset="-122"/>
                 <a:cs typeface="Noto Sans KR DemiLight" pitchFamily="34" charset="-120"/>
               </a:rPr>
-              <a:t>0.946은 이 평가셋 211건에서 나온 값입니다. 새 문장으로는 다시 검증하지 않았습니다.</a:t>
+              <a:t>완곡·작별·신변 정리 표현에 몰려 있습니다. 이 패턴군을 다음 개선 대상으로 잡았습니다.</a:t>
             </a:r>
             <a:endParaRPr lang="en-US" sz="1050" dirty="0"/>
           </a:p>
@@ -8065,213 +8065,37 @@
       </p:sp>
       <p:sp>
         <p:nvSpPr>
-          <p:cNvPr id="24" name="Shape 22"/>
-          <p:cNvSpPr/>
-          <p:nvPr/>
-        </p:nvSpPr>
-        <p:spPr>
-          <a:xfrm>
-            <a:off x="548640" y="4727448"/>
-            <a:ext cx="11064240" cy="640080"/>
-          </a:xfrm>
-          <a:prstGeom prst="roundRect">
-            <a:avLst>
-              <a:gd name="adj" fmla="val 12857"/>
-            </a:avLst>
-          </a:prstGeom>
-          <a:solidFill>
-            <a:srgbClr val="FFFFFF"/>
-          </a:solidFill>
-          <a:ln w="12700">
-            <a:solidFill>
-              <a:srgbClr val="E3E7F3"/>
-            </a:solidFill>
-            <a:prstDash val="solid"/>
-          </a:ln>
-          <a:effectLst>
-            <a:outerShdw sx="100000" sy="100000" kx="0" ky="0" algn="bl" rotWithShape="0" blurRad="127000" dist="38100" dir="5400000">
-              <a:srgbClr val="1B2547">
-                <a:alpha val="10000"/>
-              </a:srgbClr>
-            </a:outerShdw>
-          </a:effectLst>
-        </p:spPr>
-      </p:sp>
-      <p:sp>
-        <p:nvSpPr>
-          <p:cNvPr id="25" name="Text 23"/>
-          <p:cNvSpPr/>
-          <p:nvPr/>
-        </p:nvSpPr>
-        <p:spPr>
-          <a:xfrm>
-            <a:off x="822960" y="4727448"/>
-            <a:ext cx="2834640" cy="640080"/>
-          </a:xfrm>
-          <a:prstGeom prst="rect">
-            <a:avLst/>
-          </a:prstGeom>
-          <a:noFill/>
-          <a:ln/>
-        </p:spPr>
-        <p:txBody>
-          <a:bodyPr wrap="square" lIns="0" tIns="0" rIns="0" bIns="0" rtlCol="0" anchor="ctr"/>
-          <a:lstStyle/>
-          <a:p>
-            <a:pPr indent="0" marL="0">
-              <a:buNone/>
-            </a:pPr>
-            <a:r>
-              <a:rPr lang="en-US" sz="1300" b="1" dirty="0">
-                <a:solidFill>
-                  <a:srgbClr val="24325F"/>
-                </a:solidFill>
-                <a:latin typeface="Noto Sans KR" pitchFamily="34" charset="0"/>
-                <a:ea typeface="Noto Sans KR" pitchFamily="34" charset="-122"/>
-                <a:cs typeface="Noto Sans KR" pitchFamily="34" charset="-120"/>
-              </a:rPr>
-              <a:t>놓친 6건</a:t>
-            </a:r>
-            <a:endParaRPr lang="en-US" sz="1300" dirty="0"/>
-          </a:p>
-        </p:txBody>
-      </p:sp>
-      <p:sp>
-        <p:nvSpPr>
-          <p:cNvPr id="26" name="Shape 24"/>
-          <p:cNvSpPr/>
-          <p:nvPr/>
-        </p:nvSpPr>
-        <p:spPr>
-          <a:xfrm>
-            <a:off x="3703320" y="4873752"/>
-            <a:ext cx="1051560" cy="347472"/>
-          </a:xfrm>
-          <a:prstGeom prst="roundRect">
-            <a:avLst>
-              <a:gd name="adj" fmla="val 50000"/>
-            </a:avLst>
-          </a:prstGeom>
-          <a:solidFill>
-            <a:srgbClr val="EAF8F4"/>
-          </a:solidFill>
-          <a:ln/>
-        </p:spPr>
-      </p:sp>
-      <p:sp>
-        <p:nvSpPr>
-          <p:cNvPr id="27" name="Text 25"/>
-          <p:cNvSpPr/>
-          <p:nvPr/>
-        </p:nvSpPr>
-        <p:spPr>
-          <a:xfrm>
-            <a:off x="3703320" y="4873752"/>
-            <a:ext cx="1051560" cy="347472"/>
-          </a:xfrm>
-          <a:prstGeom prst="rect">
-            <a:avLst/>
-          </a:prstGeom>
-          <a:noFill/>
-          <a:ln/>
-        </p:spPr>
-        <p:txBody>
-          <a:bodyPr wrap="square" lIns="0" tIns="0" rIns="0" bIns="0" rtlCol="0" anchor="ctr"/>
-          <a:lstStyle/>
-          <a:p>
-            <a:pPr algn="ctr" indent="0" marL="0">
-              <a:buNone/>
-            </a:pPr>
-            <a:r>
-              <a:rPr lang="en-US" sz="950" b="1" dirty="0">
-                <a:solidFill>
-                  <a:srgbClr val="2F9E82"/>
-                </a:solidFill>
-                <a:latin typeface="Noto Sans KR" pitchFamily="34" charset="0"/>
-                <a:ea typeface="Noto Sans KR" pitchFamily="34" charset="-122"/>
-                <a:cs typeface="Noto Sans KR" pitchFamily="34" charset="-120"/>
-              </a:rPr>
-              <a:t>분석 완료</a:t>
-            </a:r>
-            <a:endParaRPr lang="en-US" sz="950" dirty="0"/>
-          </a:p>
-        </p:txBody>
-      </p:sp>
-      <p:sp>
-        <p:nvSpPr>
-          <p:cNvPr id="28" name="Text 26"/>
-          <p:cNvSpPr/>
-          <p:nvPr/>
-        </p:nvSpPr>
-        <p:spPr>
-          <a:xfrm>
-            <a:off x="4937760" y="4727448"/>
-            <a:ext cx="6492240" cy="640080"/>
-          </a:xfrm>
-          <a:prstGeom prst="rect">
-            <a:avLst/>
-          </a:prstGeom>
-          <a:noFill/>
-          <a:ln/>
-        </p:spPr>
-        <p:txBody>
-          <a:bodyPr wrap="square" lIns="0" tIns="0" rIns="0" bIns="0" rtlCol="0" anchor="ctr"/>
-          <a:lstStyle/>
-          <a:p>
-            <a:pPr indent="0" marL="0">
-              <a:lnSpc>
-                <a:spcPct val="120000"/>
-              </a:lnSpc>
-              <a:buNone/>
-            </a:pPr>
-            <a:r>
-              <a:rPr lang="en-US" sz="1050" dirty="0">
-                <a:solidFill>
-                  <a:srgbClr val="6E7488"/>
+          <p:cNvPr id="24" name="Text 22"/>
+          <p:cNvSpPr/>
+          <p:nvPr/>
+        </p:nvSpPr>
+        <p:spPr>
+          <a:xfrm>
+            <a:off x="11277295" y="6355080"/>
+            <a:ext cx="548640" cy="320040"/>
+          </a:xfrm>
+          <a:prstGeom prst="rect">
+            <a:avLst/>
+          </a:prstGeom>
+          <a:noFill/>
+          <a:ln/>
+        </p:spPr>
+        <p:txBody>
+          <a:bodyPr wrap="square" rtlCol="0" anchor="ctr"/>
+          <a:lstStyle/>
+          <a:p>
+            <a:pPr algn="r" indent="0" marL="0">
+              <a:buNone/>
+            </a:pPr>
+            <a:r>
+              <a:rPr lang="en-US" sz="1000" dirty="0">
+                <a:solidFill>
+                  <a:srgbClr val="B7BCCB"/>
                 </a:solidFill>
                 <a:latin typeface="Noto Sans KR DemiLight" pitchFamily="34" charset="0"/>
                 <a:ea typeface="Noto Sans KR DemiLight" pitchFamily="34" charset="-122"/>
                 <a:cs typeface="Noto Sans KR DemiLight" pitchFamily="34" charset="-120"/>
               </a:rPr>
-              <a:t>완곡·작별·신변 정리 표현에 몰려 있고, 문장 하나만으로는 사람도 라벨이 갈립니다.</a:t>
-            </a:r>
-            <a:endParaRPr lang="en-US" sz="1050" dirty="0"/>
-          </a:p>
-        </p:txBody>
-      </p:sp>
-      <p:sp>
-        <p:nvSpPr>
-          <p:cNvPr id="29" name="Text 27"/>
-          <p:cNvSpPr/>
-          <p:nvPr/>
-        </p:nvSpPr>
-        <p:spPr>
-          <a:xfrm>
-            <a:off x="11277295" y="6355080"/>
-            <a:ext cx="548640" cy="320040"/>
-          </a:xfrm>
-          <a:prstGeom prst="rect">
-            <a:avLst/>
-          </a:prstGeom>
-          <a:noFill/>
-          <a:ln/>
-        </p:spPr>
-        <p:txBody>
-          <a:bodyPr wrap="square" rtlCol="0" anchor="ctr"/>
-          <a:lstStyle/>
-          <a:p>
-            <a:pPr algn="r" indent="0" marL="0">
-              <a:buNone/>
-            </a:pPr>
-            <a:r>
-              <a:rPr lang="en-US" sz="1000" dirty="0">
-                <a:solidFill>
-                  <a:srgbClr val="B7BCCB"/>
-                </a:solidFill>
-                <a:latin typeface="Noto Sans KR DemiLight" pitchFamily="34" charset="0"/>
-                <a:ea typeface="Noto Sans KR DemiLight" pitchFamily="34" charset="-122"/>
-                <a:cs typeface="Noto Sans KR DemiLight" pitchFamily="34" charset="-120"/>
-              </a:rPr>
               <a:t>14</a:t>
             </a:r>
             <a:endParaRPr lang="en-US" sz="1000" dirty="0"/>
@@ -8280,7 +8104,7 @@
       </p:sp>
       <p:sp>
         <p:nvSpPr>
-          <p:cNvPr id="30" name="Text 28"/>
+          <p:cNvPr id="25" name="Text 23"/>
           <p:cNvSpPr/>
           <p:nvPr/>
         </p:nvSpPr>
@@ -9187,7 +9011,7 @@
                 <a:ea typeface="Noto Sans KR" pitchFamily="34" charset="-122"/>
                 <a:cs typeface="Noto Sans KR" pitchFamily="34" charset="-120"/>
               </a:rPr>
-              <a:t>어떻게 만들었나</a:t>
+              <a:t>설계와 구현</a:t>
             </a:r>
             <a:endParaRPr lang="en-US" sz="2300" dirty="0"/>
           </a:p>
@@ -9327,7 +9151,7 @@
                 <a:ea typeface="Noto Sans KR" pitchFamily="34" charset="-122"/>
                 <a:cs typeface="Noto Sans KR" pitchFamily="34" charset="-120"/>
               </a:rPr>
-              <a:t>성과와 한계</a:t>
+              <a:t>성과와 확장</a:t>
             </a:r>
             <a:endParaRPr lang="en-US" sz="2300" dirty="0"/>
           </a:p>
@@ -9366,7 +9190,7 @@
                 <a:ea typeface="Noto Sans KR DemiLight" pitchFamily="34" charset="-122"/>
                 <a:cs typeface="Noto Sans KR DemiLight" pitchFamily="34" charset="-120"/>
               </a:rPr>
-              <a:t>실측 지표 · 관제 화면 · 못 한 것</a:t>
+              <a:t>실측 지표 · 관제 화면 · 다음 단계</a:t>
             </a:r>
             <a:endParaRPr lang="en-US" sz="1250" dirty="0"/>
           </a:p>
@@ -10930,7 +10754,7 @@
                 <a:ea typeface="Noto Sans KR" pitchFamily="34" charset="-122"/>
                 <a:cs typeface="Noto Sans KR" pitchFamily="34" charset="-120"/>
               </a:rPr>
-              <a:t>사용자가 앱을 열기 전에, 먼저 다가갑니다</a:t>
+              <a:t>앱을 열기 전에 먼저 닿는 구조</a:t>
             </a:r>
             <a:endParaRPr lang="en-US" sz="3000" dirty="0"/>
           </a:p>
@@ -11208,7 +11032,7 @@
                 <a:ea typeface="Noto Sans KR DemiLight" pitchFamily="34" charset="-122"/>
                 <a:cs typeface="Noto Sans KR DemiLight" pitchFamily="34" charset="-120"/>
               </a:rPr>
-              <a:t>연속 이탈 3일 → 조건 6개 검사 → 첫 발화 생성 → 세션 선생성 → FCM 푸시 · 홈 카드 · 배너로 먼저 말을 겁니다</a:t>
+              <a:t>연속 이탈 3일 → 조건 6개 검사 → 첫 발화 생성 → 세션 생성 → FCM 푸시 · 홈 카드 · 배너로 먼저 말을 겁니다</a:t>
             </a:r>
             <a:endParaRPr lang="en-US" sz="1150" dirty="0"/>
           </a:p>
@@ -12492,7 +12316,7 @@
                 <a:ea typeface="Noto Sans KR Black" pitchFamily="34" charset="-122"/>
                 <a:cs typeface="Noto Sans KR Black" pitchFamily="34" charset="-120"/>
               </a:rPr>
-              <a:t>어떻게 만들었나</a:t>
+              <a:t>설계와 구현</a:t>
             </a:r>
             <a:endParaRPr lang="en-US" sz="3400" dirty="0"/>
           </a:p>
@@ -12680,7 +12504,7 @@
                 <a:ea typeface="Noto Sans KR" pitchFamily="34" charset="-122"/>
                 <a:cs typeface="Noto Sans KR" pitchFamily="34" charset="-120"/>
               </a:rPr>
-              <a:t>왜 서버를 둘로 나눴나</a:t>
+              <a:t>둘로 나눈 서버</a:t>
             </a:r>
             <a:endParaRPr lang="en-US" sz="3000" dirty="0"/>
           </a:p>
@@ -13542,7 +13366,7 @@
                 <a:ea typeface="Noto Sans KR" pitchFamily="34" charset="-122"/>
                 <a:cs typeface="Noto Sans KR" pitchFamily="34" charset="-120"/>
               </a:rPr>
-              <a:t>왜 감정 분류 대신 이탈 탐지인가</a:t>
+              <a:t>감정 분류 대신 개인 기준선 이탈 탐지</a:t>
             </a:r>
             <a:endParaRPr lang="en-US" sz="3000" dirty="0"/>
           </a:p>

--- a/documents/최종발표자료_귀기울임.pptx
+++ b/documents/최종발표자료_귀기울임.pptx
@@ -8910,7 +8910,7 @@
                 <a:ea typeface="Noto Sans KR DemiLight" pitchFamily="34" charset="-122"/>
                 <a:cs typeface="Noto Sans KR DemiLight" pitchFamily="34" charset="-120"/>
               </a:rPr>
-              <a:t>왜 귀기울임인가 · 먼저 다가간다는 것</a:t>
+              <a:t>감지하고도 놓치는 구조 · 먼저 다가가는 설계 · 3분 시연</a:t>
             </a:r>
             <a:endParaRPr lang="en-US" sz="1250" dirty="0"/>
           </a:p>
@@ -9050,7 +9050,7 @@
                 <a:ea typeface="Noto Sans KR DemiLight" pitchFamily="34" charset="-122"/>
                 <a:cs typeface="Noto Sans KR DemiLight" pitchFamily="34" charset="-120"/>
               </a:rPr>
-              <a:t>아키텍처 · AI 판단 방식 · 안전 설계 · 보안</a:t>
+              <a:t>서버 분리 · 이탈 탐지 · 위기 탐지 2단계</a:t>
             </a:r>
             <a:endParaRPr lang="en-US" sz="1250" dirty="0"/>
           </a:p>
@@ -9190,7 +9190,7 @@
                 <a:ea typeface="Noto Sans KR DemiLight" pitchFamily="34" charset="-122"/>
                 <a:cs typeface="Noto Sans KR DemiLight" pitchFamily="34" charset="-120"/>
               </a:rPr>
-              <a:t>실측 지표 · 관제 화면 · 다음 단계</a:t>
+              <a:t>실측 지표 · 관제 화면 · 보안 설계 · 다음 단계</a:t>
             </a:r>
             <a:endParaRPr lang="en-US" sz="1250" dirty="0"/>
           </a:p>

--- a/documents/최종발표자료_귀기울임.pptx
+++ b/documents/최종발표자료_귀기울임.pptx
@@ -13498,7 +13498,7 @@
                 <a:ea typeface="Noto Sans KR" pitchFamily="34" charset="-122"/>
                 <a:cs typeface="Noto Sans KR" pitchFamily="34" charset="-120"/>
               </a:rPr>
-              <a:t>시도</a:t>
+              <a:t>학습</a:t>
             </a:r>
             <a:endParaRPr lang="en-US" sz="1700" dirty="0"/>
           </a:p>
@@ -13540,7 +13540,7 @@
                 <a:ea typeface="Noto Sans KR DemiLight" pitchFamily="34" charset="-122"/>
                 <a:cs typeface="Noto Sans KR DemiLight" pitchFamily="34" charset="-120"/>
               </a:rPr>
-              <a:t>감정 라벨이 붙은 데이터로 분류 모델을 학습하려 했습니다</a:t>
+              <a:t>GLOBEM 수면·걸음 피처로 LightGBM 분류기를 학습했습니다. 참가자 단위 분할(GroupKFold)로 평가했습니다</a:t>
             </a:r>
             <a:endParaRPr lang="en-US" sz="1150" dirty="0"/>
           </a:p>
@@ -13696,7 +13696,7 @@
                 <a:ea typeface="Noto Sans KR" pitchFamily="34" charset="-122"/>
                 <a:cs typeface="Noto Sans KR" pitchFamily="34" charset="-120"/>
               </a:rPr>
-              <a:t>검증</a:t>
+              <a:t>재현 검증</a:t>
             </a:r>
             <a:endParaRPr lang="en-US" sz="1700" dirty="0"/>
           </a:p>
@@ -13738,7 +13738,7 @@
                 <a:ea typeface="Noto Sans KR DemiLight" pitchFamily="34" charset="-122"/>
                 <a:cs typeface="Noto Sans KR DemiLight" pitchFamily="34" charset="-120"/>
               </a:rPr>
-              <a:t>국내 라벨 데이터셋을 구하지 못해 공개 데이터(GLOBEM)로 검증했더니 ROC-AUC 0.528, 무작위 수준이었습니다</a:t>
+              <a:t>ROC-AUC 0.528. 표본 탓인지 확인하려 LifeSnaps(63명·2290일·피처 65개)로 20회 반복했더니 감정 7종이 0.479~0.540 이었습니다</a:t>
             </a:r>
             <a:endParaRPr lang="en-US" sz="1150" dirty="0"/>
           </a:p>
@@ -13936,7 +13936,7 @@
                 <a:ea typeface="Noto Sans KR DemiLight" pitchFamily="34" charset="-122"/>
                 <a:cs typeface="Noto Sans KR DemiLight" pitchFamily="34" charset="-120"/>
               </a:rPr>
-              <a:t>개인 기준선 이탈 탐지로 방향을 바꿨습니다 — 중앙값·MAD robust z, 지표 7개 중 2개 이상 이탈</a:t>
+              <a:t>근거를 갖고 채택하지 않았습니다. 개인 기준선 이탈 탐지로 전환 — 중앙값·MAD robust z, 지표 7개 중 2개 이상 이탈</a:t>
             </a:r>
             <a:endParaRPr lang="en-US" sz="1150" dirty="0"/>
           </a:p>
@@ -13997,7 +13997,7 @@
                 <a:ea typeface="Noto Sans KR" pitchFamily="34" charset="-122"/>
                 <a:cs typeface="Noto Sans KR" pitchFamily="34" charset="-120"/>
               </a:rPr>
-              <a:t>"감정을 분석·분류합니다"라고 말하지 않는 이유</a:t>
+              <a:t>두 번 검증하고 채택하지 않았습니다</a:t>
             </a:r>
             <a:endParaRPr lang="en-US" sz="1450" dirty="0"/>
           </a:p>
@@ -14039,7 +14039,7 @@
                 <a:ea typeface="Noto Sans KR DemiLight" pitchFamily="34" charset="-122"/>
                 <a:cs typeface="Noto Sans KR DemiLight" pitchFamily="34" charset="-120"/>
               </a:rPr>
-              <a:t>감정 코드는 이탈 정도를 표시하는 규칙 기반 산출값입니다. 학습된 분류기가 정한 값이 아니라, 코드에서 model_version이 "rule-"로 시작하는 것이 그 표시입니다. 대신 그 사람 본인의 평소와 비교하는 개인 기준선 이탈 탐지로 실제 서비스를 완성했습니다.</a:t>
+              <a:t>표본을 40명에서 63명으로, 피처를 8개에서 65개로 늘려도 결과가 같았습니다. 정작 잡아야 할 SAD(0.485)·TENSE(0.497)가 무작위 이하였습니다. 정신건강 서비스에서 근거 없는 분류기를 쓰는 쪽이 더 위험하다고 판단해, 감정 코드는 학습된 분류기가 아니라 이탈 정도를 표시하는 규칙 기반 산출값으로 두었습니다.</a:t>
             </a:r>
             <a:endParaRPr lang="en-US" sz="1200" dirty="0"/>
           </a:p>
